--- a/Slides/Semana 3/semana_3_slides.pptx
+++ b/Slides/Semana 3/semana_3_slides.pptx
@@ -1229,7 +1229,7 @@
           <a:p>
             <a:r>
               <a:rPr lang="en-US" dirty="0"/>
-              <a:t>Notas: Transição para os 20 min de demonstração. Reforçar que a demonstração não abre Blender nem 3D Coat — é a primeira aula inteiramente curatorial do semestre, e isso é proposital: decisão de projeto é etapa distinta de execução técnica.
+              <a:t>Notas: Transição para os 20 min de demonstração. Reforçar que a demonstração não abre Blender nem 3DCoatTextura — é a primeira aula inteiramente curatorial do semestre, e isso é proposital: decisão de projeto é etapa distinta de execução técnica.
 [!FIGURA]
 Objetivo didático — Mostrar exemplos concretos de Hero Assets publicados e sua relação direta com um moodboard, para que o estudante veja o padrão de qualidade esperado antes de decidir o próprio.
 Arquivo sugerido — assets/hero_asset_exemplos.webp
@@ -2292,7 +2292,7 @@
           <a:p>
             <a:r>
               <a:rPr lang="en-US" dirty="0"/>
-              <a:t>Notas: O Hero Asset é onde cada etapa do pipeline é testada pela primeira vez — UV na Semana 4, material PBR nas Semanas 6-7, texturização no 3D Coat nas Semanas 8-9. Só depois disso validado é que o Kit Modular é produzido de fato, a partir da Semana 10. Não detalhar UV ou PBR agora — apenas nomear a trajetória.</a:t>
+              <a:t>Notas: O Hero Asset é onde cada etapa do pipeline é testada pela primeira vez — UV na Semana 4, material PBR nas Semanas 6-7, texturização no 3DCoatTextura nas Semanas 8-9. Só depois disso validado é que o Kit Modular é produzido de fato, a partir da Semana 10. Não detalhar UV ou PBR agora — apenas nomear a trajetória.</a:t>
             </a:r>
             <a:endParaRPr lang="en-US" dirty="0"/>
           </a:p>
